--- a/dist/초3/수학/분수와소수/초3_수학_분수와소수_01_분수의뜻.pptx
+++ b/dist/초3/수학/분수와소수/초3_수학_분수와소수_01_분수의뜻.pptx
@@ -119,45 +119,45 @@
   <p:extLst>
     <p:ext uri="{521415D9-36F7-43E2-AB2F-B90AF26B5E84}">
       <p14:sectionLst xmlns:p14="http://schemas.microsoft.com/office/powerpoint/2010/main">
-        <p14:section name="도입" id="{3d0d7894-dc48-d3af-2f2e-adea3374e5a1}">
+        <p14:section name="도입" id="{5b103429-87a1-851c-2b5b-1298934af6cc}">
           <p14:sldIdLst>
             <p14:sldId id="256"/>
             <p14:sldId id="257"/>
           </p14:sldIdLst>
         </p14:section>
-        <p14:section name="개념" id="{8e73b627-372e-3b36-8345-7b8d6b426cb1}">
+        <p14:section name="개념" id="{f65de12f-9027-3c2d-67b2-a67fa30fd574}">
           <p14:sldIdLst>
             <p14:sldId id="258"/>
             <p14:sldId id="260"/>
             <p14:sldId id="261"/>
           </p14:sldIdLst>
         </p14:section>
-        <p14:section name="연습" id="{b0bd8979-6338-1e59-b90e-c44615f122c5}">
+        <p14:section name="연습" id="{3730896b-0ef2-8e7d-b96b-9576b3e677e8}">
           <p14:sldIdLst>
             <p14:sldId id="259"/>
             <p14:sldId id="262"/>
             <p14:sldId id="263"/>
           </p14:sldIdLst>
         </p14:section>
-        <p14:section name="개념" id="{faad3cea-0035-7a6b-bdfd-89400e2fc1e8}">
+        <p14:section name="개념" id="{b9de69ff-6b9b-dd80-10c9-ded4782d3241}">
           <p14:sldIdLst/>
         </p14:section>
-        <p14:section name="연습" id="{36c3ef6d-00f8-7997-d442-d6a95d5b034a}">
+        <p14:section name="연습" id="{c6d45253-6b31-00e4-9ae3-324bc1870cd6}">
           <p14:sldIdLst/>
         </p14:section>
-        <p14:section name="확인" id="{eb580a1d-aeb9-0002-3d0b-754a8c205a58}">
+        <p14:section name="확인" id="{839a6abf-619f-5936-91cc-b612668adc70}">
           <p14:sldIdLst>
             <p14:sldId id="264"/>
             <p14:sldId id="265"/>
             <p14:sldId id="266"/>
           </p14:sldIdLst>
         </p14:section>
-        <p14:section name="정리" id="{1fe3235e-d4f6-05c2-49d9-ef658f0d1e54}">
+        <p14:section name="정리" id="{970112e7-c91e-eb80-5f17-ca0452d0c670}">
           <p14:sldIdLst>
             <p14:sldId id="267"/>
           </p14:sldIdLst>
         </p14:section>
-        <p14:section name="보충" id="{77b86f02-e9d5-b831-9753-f2b4f2b33571}">
+        <p14:section name="보충" id="{dc3babd0-ef58-d0a8-2f78-d3a599bde5fd}">
           <p14:sldIdLst>
             <p14:sldId id="268"/>
           </p14:sldIdLst>
